--- a/html/COMP-_L4.3_PreLec.pptx
+++ b/html/COMP-_L4.3_PreLec.pptx
@@ -224,7 +224,7 @@
           <a:p>
             <a:fld id="{5B3C0760-A542-FE4F-8EBF-B1B1FB6407CD}" type="datetimeFigureOut">
               <a:rPr lang="en-001" smtClean="0"/>
-              <a:t>07/10/2026</a:t>
+              <a:t>12/10/2026</a:t>
             </a:fld>
             <a:endParaRPr lang="en-001"/>
           </a:p>
@@ -765,7 +765,7 @@
           <a:p>
             <a:fld id="{5BCAD085-E8A6-8845-BD4E-CB4CCA059FC4}" type="datetimeFigureOut">
               <a:rPr lang="en-US" smtClean="0"/>
-              <a:t>10/7/26</a:t>
+              <a:t>10/12/26</a:t>
             </a:fld>
             <a:endParaRPr lang="en-US"/>
           </a:p>
@@ -933,7 +933,7 @@
           <a:p>
             <a:fld id="{5BCAD085-E8A6-8845-BD4E-CB4CCA059FC4}" type="datetimeFigureOut">
               <a:rPr lang="en-US" smtClean="0"/>
-              <a:t>10/7/26</a:t>
+              <a:t>10/12/26</a:t>
             </a:fld>
             <a:endParaRPr lang="en-US"/>
           </a:p>
@@ -1111,7 +1111,7 @@
           <a:p>
             <a:fld id="{5BCAD085-E8A6-8845-BD4E-CB4CCA059FC4}" type="datetimeFigureOut">
               <a:rPr lang="en-US" smtClean="0"/>
-              <a:t>10/7/26</a:t>
+              <a:t>10/12/26</a:t>
             </a:fld>
             <a:endParaRPr lang="en-US"/>
           </a:p>
@@ -1279,7 +1279,7 @@
           <a:p>
             <a:fld id="{5BCAD085-E8A6-8845-BD4E-CB4CCA059FC4}" type="datetimeFigureOut">
               <a:rPr lang="en-US" smtClean="0"/>
-              <a:t>10/7/26</a:t>
+              <a:t>10/12/26</a:t>
             </a:fld>
             <a:endParaRPr lang="en-US"/>
           </a:p>
@@ -1524,7 +1524,7 @@
           <a:p>
             <a:fld id="{5BCAD085-E8A6-8845-BD4E-CB4CCA059FC4}" type="datetimeFigureOut">
               <a:rPr lang="en-US" smtClean="0"/>
-              <a:t>10/7/26</a:t>
+              <a:t>10/12/26</a:t>
             </a:fld>
             <a:endParaRPr lang="en-US"/>
           </a:p>
@@ -1809,7 +1809,7 @@
           <a:p>
             <a:fld id="{5BCAD085-E8A6-8845-BD4E-CB4CCA059FC4}" type="datetimeFigureOut">
               <a:rPr lang="en-US" smtClean="0"/>
-              <a:t>10/7/26</a:t>
+              <a:t>10/12/26</a:t>
             </a:fld>
             <a:endParaRPr lang="en-US"/>
           </a:p>
@@ -2228,7 +2228,7 @@
           <a:p>
             <a:fld id="{5BCAD085-E8A6-8845-BD4E-CB4CCA059FC4}" type="datetimeFigureOut">
               <a:rPr lang="en-US" smtClean="0"/>
-              <a:t>10/7/26</a:t>
+              <a:t>10/12/26</a:t>
             </a:fld>
             <a:endParaRPr lang="en-US"/>
           </a:p>
@@ -2345,7 +2345,7 @@
           <a:p>
             <a:fld id="{5BCAD085-E8A6-8845-BD4E-CB4CCA059FC4}" type="datetimeFigureOut">
               <a:rPr lang="en-US" smtClean="0"/>
-              <a:t>10/7/26</a:t>
+              <a:t>10/12/26</a:t>
             </a:fld>
             <a:endParaRPr lang="en-US"/>
           </a:p>
@@ -2440,7 +2440,7 @@
           <a:p>
             <a:fld id="{5BCAD085-E8A6-8845-BD4E-CB4CCA059FC4}" type="datetimeFigureOut">
               <a:rPr lang="en-US" smtClean="0"/>
-              <a:t>10/7/26</a:t>
+              <a:t>10/12/26</a:t>
             </a:fld>
             <a:endParaRPr lang="en-US"/>
           </a:p>
@@ -2715,7 +2715,7 @@
           <a:p>
             <a:fld id="{5BCAD085-E8A6-8845-BD4E-CB4CCA059FC4}" type="datetimeFigureOut">
               <a:rPr lang="en-US" smtClean="0"/>
-              <a:t>10/7/26</a:t>
+              <a:t>10/12/26</a:t>
             </a:fld>
             <a:endParaRPr lang="en-US"/>
           </a:p>
@@ -2967,7 +2967,7 @@
           <a:p>
             <a:fld id="{5BCAD085-E8A6-8845-BD4E-CB4CCA059FC4}" type="datetimeFigureOut">
               <a:rPr lang="en-US" smtClean="0"/>
-              <a:t>10/7/26</a:t>
+              <a:t>10/12/26</a:t>
             </a:fld>
             <a:endParaRPr lang="en-US"/>
           </a:p>
@@ -3178,7 +3178,7 @@
           <a:p>
             <a:fld id="{5BCAD085-E8A6-8845-BD4E-CB4CCA059FC4}" type="datetimeFigureOut">
               <a:rPr lang="en-US" smtClean="0"/>
-              <a:t>10/7/26</a:t>
+              <a:t>10/12/26</a:t>
             </a:fld>
             <a:endParaRPr lang="en-US"/>
           </a:p>
@@ -3259,6 +3259,146 @@
               <a:t>‹#›</a:t>
             </a:fld>
             <a:endParaRPr lang="en-US"/>
+          </a:p>
+        </p:txBody>
+      </p:sp>
+      <p:pic>
+        <p:nvPicPr>
+          <p:cNvPr id="7" name="Logo" descr="University of Southampton logo">
+            <a:extLst>
+              <a:ext uri="{FF2B5EF4-FFF2-40B4-BE49-F238E27FC236}">
+                <a16:creationId xmlns:a16="http://schemas.microsoft.com/office/drawing/2014/main" id="{0E2850B5-0FD3-194F-F908-F33C6E304BB6}"/>
+              </a:ext>
+            </a:extLst>
+          </p:cNvPr>
+          <p:cNvPicPr>
+            <a:picLocks noChangeAspect="1"/>
+          </p:cNvPicPr>
+          <p:nvPr userDrawn="1"/>
+        </p:nvPicPr>
+        <p:blipFill>
+          <a:blip r:embed="rId13"/>
+          <a:stretch>
+            <a:fillRect/>
+          </a:stretch>
+        </p:blipFill>
+        <p:spPr>
+          <a:xfrm>
+            <a:off x="7406640" y="6384033"/>
+            <a:ext cx="1371600" cy="291086"/>
+          </a:xfrm>
+          <a:prstGeom prst="rect">
+            <a:avLst/>
+          </a:prstGeom>
+        </p:spPr>
+      </p:pic>
+      <p:sp>
+        <p:nvSpPr>
+          <p:cNvPr id="8" name="Footer slide number">
+            <a:extLst>
+              <a:ext uri="{FF2B5EF4-FFF2-40B4-BE49-F238E27FC236}">
+                <a16:creationId xmlns:a16="http://schemas.microsoft.com/office/drawing/2014/main" id="{A3EA00AC-4ACD-F95D-0345-28B06C9977BC}"/>
+              </a:ext>
+            </a:extLst>
+          </p:cNvPr>
+          <p:cNvSpPr txBox="1"/>
+          <p:nvPr userDrawn="1"/>
+        </p:nvSpPr>
+        <p:spPr>
+          <a:xfrm>
+            <a:off x="365760" y="6384033"/>
+            <a:ext cx="457200" cy="291086"/>
+          </a:xfrm>
+          <a:prstGeom prst="rect">
+            <a:avLst/>
+          </a:prstGeom>
+          <a:noFill/>
+        </p:spPr>
+        <p:txBody>
+          <a:bodyPr wrap="square" lIns="0" tIns="0" rIns="0" bIns="0" anchor="ctr">
+            <a:noAutofit/>
+          </a:bodyPr>
+          <a:lstStyle/>
+          <a:p>
+            <a:fld id="{B6F15528-21DE-4FAA-801E-634DDDAF4B2B}" type="slidenum">
+              <a:rPr lang="en-GB" sz="1400" dirty="0">
+                <a:solidFill>
+                  <a:srgbClr val="1F497D"/>
+                </a:solidFill>
+              </a:rPr>
+              <a:t>‹#›</a:t>
+            </a:fld>
+            <a:endParaRPr lang="en-GB" sz="1400" dirty="0">
+              <a:solidFill>
+                <a:srgbClr val="1F497D"/>
+              </a:solidFill>
+            </a:endParaRPr>
+          </a:p>
+        </p:txBody>
+      </p:sp>
+      <p:sp>
+        <p:nvSpPr>
+          <p:cNvPr id="9" name="Footer SEAtS">
+            <a:extLst>
+              <a:ext uri="{FF2B5EF4-FFF2-40B4-BE49-F238E27FC236}">
+                <a16:creationId xmlns:a16="http://schemas.microsoft.com/office/drawing/2014/main" id="{988A9ED4-3454-26C7-2687-31D5576666E4}"/>
+              </a:ext>
+            </a:extLst>
+          </p:cNvPr>
+          <p:cNvSpPr txBox="1"/>
+          <p:nvPr userDrawn="1"/>
+        </p:nvSpPr>
+        <p:spPr>
+          <a:xfrm>
+            <a:off x="742950" y="6430390"/>
+            <a:ext cx="3200400" cy="291086"/>
+          </a:xfrm>
+          <a:prstGeom prst="rect">
+            <a:avLst/>
+          </a:prstGeom>
+          <a:noFill/>
+        </p:spPr>
+        <p:txBody>
+          <a:bodyPr wrap="square" lIns="0" tIns="0" rIns="0" bIns="0" anchor="ctr">
+            <a:noAutofit/>
+          </a:bodyPr>
+          <a:lstStyle/>
+          <a:p>
+            <a:pPr marL="0" marR="0" indent="0" algn="l" defTabSz="457200" rtl="0" eaLnBrk="1" fontAlgn="auto" latinLnBrk="0" hangingPunct="1">
+              <a:lnSpc>
+                <a:spcPct val="100000"/>
+              </a:lnSpc>
+              <a:spcBef>
+                <a:spcPts val="0"/>
+              </a:spcBef>
+              <a:spcAft>
+                <a:spcPts val="0"/>
+              </a:spcAft>
+              <a:buClrTx/>
+              <a:buSzTx/>
+              <a:buFontTx/>
+              <a:buNone/>
+              <a:tabLst/>
+              <a:defRPr/>
+            </a:pPr>
+            <a:r>
+              <a:rPr lang="en-GB" sz="1000" b="1" dirty="0">
+                <a:solidFill>
+                  <a:srgbClr val="1F497D"/>
+                </a:solidFill>
+              </a:rPr>
+              <a:t>SEAtS | 369272</a:t>
+            </a:r>
+          </a:p>
+          <a:p>
+            <a:r>
+              <a:rPr lang="en-GB" sz="800" b="1" dirty="0">
+                <a:solidFill>
+                  <a:srgbClr val="8C8C8C"/>
+                </a:solidFill>
+              </a:rPr>
+              <a:t>© University of Southampton</a:t>
+            </a:r>
           </a:p>
         </p:txBody>
       </p:sp>
@@ -13667,6 +13807,71 @@
                 <a:schemeClr val="tx2"/>
               </a:solidFill>
             </a:endParaRPr>
+          </a:p>
+        </p:txBody>
+      </p:sp>
+      <p:pic>
+        <p:nvPicPr>
+          <p:cNvPr id="3" name="Picture 2" descr="A qr code with a black and white background&#10;&#10;AI-generated content may be incorrect.">
+            <a:extLst>
+              <a:ext uri="{FF2B5EF4-FFF2-40B4-BE49-F238E27FC236}">
+                <a16:creationId xmlns:a16="http://schemas.microsoft.com/office/drawing/2014/main" id="{DC840B88-378F-564F-3806-E806DA20D698}"/>
+              </a:ext>
+            </a:extLst>
+          </p:cNvPr>
+          <p:cNvPicPr>
+            <a:picLocks noChangeAspect="1"/>
+          </p:cNvPicPr>
+          <p:nvPr/>
+        </p:nvPicPr>
+        <p:blipFill>
+          <a:blip r:embed="rId2"/>
+          <a:stretch>
+            <a:fillRect/>
+          </a:stretch>
+        </p:blipFill>
+        <p:spPr>
+          <a:xfrm>
+            <a:off x="3460749" y="3332748"/>
+            <a:ext cx="2222502" cy="2222502"/>
+          </a:xfrm>
+          <a:prstGeom prst="rect">
+            <a:avLst/>
+          </a:prstGeom>
+        </p:spPr>
+      </p:pic>
+      <p:sp>
+        <p:nvSpPr>
+          <p:cNvPr id="6" name="TextBox 5">
+            <a:extLst>
+              <a:ext uri="{FF2B5EF4-FFF2-40B4-BE49-F238E27FC236}">
+                <a16:creationId xmlns:a16="http://schemas.microsoft.com/office/drawing/2014/main" id="{9C813344-3463-CFE5-E51F-5858E07CAE1D}"/>
+              </a:ext>
+            </a:extLst>
+          </p:cNvPr>
+          <p:cNvSpPr txBox="1"/>
+          <p:nvPr/>
+        </p:nvSpPr>
+        <p:spPr>
+          <a:xfrm>
+            <a:off x="3984625" y="5678906"/>
+            <a:ext cx="1174749" cy="461665"/>
+          </a:xfrm>
+          <a:prstGeom prst="rect">
+            <a:avLst/>
+          </a:prstGeom>
+          <a:noFill/>
+        </p:spPr>
+        <p:txBody>
+          <a:bodyPr wrap="square">
+            <a:spAutoFit/>
+          </a:bodyPr>
+          <a:lstStyle/>
+          <a:p>
+            <a:r>
+              <a:rPr lang="en-001" sz="2400" dirty="0"/>
+              <a:t>369272</a:t>
+            </a:r>
           </a:p>
         </p:txBody>
       </p:sp>
